--- a/public/teach/decks/agent-skills-201.pptx
+++ b/public/teach/decks/agent-skills-201.pptx
@@ -3146,8 +3146,8 @@
         </p:nvSpPr>
         <p:spPr>
           <a:xfrm>
-            <a:off x="822960" y="1920240"/>
-            <a:ext cx="10515600" cy="1828800"/>
+            <a:off x="822960" y="1874519"/>
+            <a:ext cx="10607040" cy="1920240"/>
           </a:xfrm>
           <a:prstGeom prst="rect">
             <a:avLst/>
@@ -3166,7 +3166,7 @@
               </a:lnSpc>
             </a:pPr>
             <a:r>
-              <a:rPr sz="6600" b="1">
+              <a:rPr sz="5800" b="1">
                 <a:solidFill>
                   <a:srgbClr val="FFFFFF"/>
                 </a:solidFill>
@@ -3185,8 +3185,8 @@
         </p:nvSpPr>
         <p:spPr>
           <a:xfrm>
-            <a:off x="822960" y="3840480"/>
-            <a:ext cx="8686800" cy="1188720"/>
+            <a:off x="822960" y="3886200"/>
+            <a:ext cx="9144000" cy="1188720"/>
           </a:xfrm>
           <a:prstGeom prst="rect">
             <a:avLst/>
@@ -3205,7 +3205,7 @@
               </a:lnSpc>
             </a:pPr>
             <a:r>
-              <a:rPr sz="2400" b="0">
+              <a:rPr sz="2300" b="0">
                 <a:solidFill>
                   <a:srgbClr val="A1A1A1"/>
                 </a:solidFill>
@@ -3224,8 +3224,8 @@
         </p:nvSpPr>
         <p:spPr>
           <a:xfrm>
-            <a:off x="822960" y="5212080"/>
-            <a:ext cx="8229600" cy="548640"/>
+            <a:off x="822960" y="5257800"/>
+            <a:ext cx="9144000" cy="548640"/>
           </a:xfrm>
           <a:prstGeom prst="rect">
             <a:avLst/>
@@ -3433,8 +3433,8 @@
         </p:nvSpPr>
         <p:spPr>
           <a:xfrm>
-            <a:off x="822960" y="1188720"/>
-            <a:ext cx="10515600" cy="822960"/>
+            <a:off x="822960" y="1170432"/>
+            <a:ext cx="10607040" cy="822960"/>
           </a:xfrm>
           <a:prstGeom prst="rect">
             <a:avLst/>
@@ -3449,7 +3449,7 @@
           <a:p>
             <a:pPr algn="l"/>
             <a:r>
-              <a:rPr sz="3400" b="1">
+              <a:rPr sz="3200" b="1">
                 <a:solidFill>
                   <a:srgbClr val="FFFFFF"/>
                 </a:solidFill>
@@ -3469,7 +3469,7 @@
           <p:nvPr/>
         </p:nvGraphicFramePr>
         <p:xfrm>
-          <a:off x="822960" y="2148840"/>
+          <a:off x="822960" y="2103120"/>
           <a:ext cx="10515600" cy="3657600"/>
         </p:xfrm>
         <a:graphic>
@@ -4221,8 +4221,8 @@
         </p:nvSpPr>
         <p:spPr>
           <a:xfrm>
-            <a:off x="822960" y="1280160"/>
-            <a:ext cx="10515600" cy="822960"/>
+            <a:off x="822960" y="1207008"/>
+            <a:ext cx="10515600" cy="731520"/>
           </a:xfrm>
           <a:prstGeom prst="rect">
             <a:avLst/>
@@ -4237,7 +4237,7 @@
           <a:p>
             <a:pPr algn="l"/>
             <a:r>
-              <a:rPr sz="3400" b="1">
+              <a:rPr sz="3000" b="1">
                 <a:solidFill>
                   <a:srgbClr val="FFFFFF"/>
                 </a:solidFill>
@@ -4264,8 +4264,8 @@
         </p:blipFill>
         <p:spPr>
           <a:xfrm>
-            <a:off x="822960" y="2148840"/>
-            <a:ext cx="9052560" cy="5092065"/>
+            <a:off x="2804008" y="2057400"/>
+            <a:ext cx="6583680" cy="3703320"/>
           </a:xfrm>
           <a:prstGeom prst="rect">
             <a:avLst/>
@@ -4280,8 +4280,8 @@
         </p:nvSpPr>
         <p:spPr>
           <a:xfrm>
-            <a:off x="822960" y="5806440"/>
-            <a:ext cx="10424160" cy="548640"/>
+            <a:off x="822960" y="5943600"/>
+            <a:ext cx="10515600" cy="457200"/>
           </a:xfrm>
           <a:prstGeom prst="rect">
             <a:avLst/>
@@ -4294,9 +4294,9 @@
           </a:bodyPr>
           <a:lstStyle/>
           <a:p>
-            <a:pPr algn="l"/>
-            <a:r>
-              <a:rPr sz="1500" b="0">
+            <a:pPr algn="ctr"/>
+            <a:r>
+              <a:rPr sz="1400" b="0">
                 <a:solidFill>
                   <a:srgbClr val="7D7D7D"/>
                 </a:solidFill>
@@ -4489,8 +4489,8 @@
         </p:nvSpPr>
         <p:spPr>
           <a:xfrm>
-            <a:off x="822960" y="1371600"/>
-            <a:ext cx="10515600" cy="1097280"/>
+            <a:off x="822960" y="1325880"/>
+            <a:ext cx="10607040" cy="1005840"/>
           </a:xfrm>
           <a:prstGeom prst="rect">
             <a:avLst/>
@@ -4509,7 +4509,7 @@
               </a:lnSpc>
             </a:pPr>
             <a:r>
-              <a:rPr sz="4000" b="1">
+              <a:rPr sz="3600" b="1">
                 <a:solidFill>
                   <a:srgbClr val="FFFFFF"/>
                 </a:solidFill>
@@ -4528,8 +4528,8 @@
         </p:nvSpPr>
         <p:spPr>
           <a:xfrm>
-            <a:off x="822960" y="2743200"/>
-            <a:ext cx="10424160" cy="3291840"/>
+            <a:off x="822960" y="2606040"/>
+            <a:ext cx="10515600" cy="3566160"/>
           </a:xfrm>
           <a:prstGeom prst="rect">
             <a:avLst/>
@@ -4544,14 +4544,14 @@
           <a:p>
             <a:pPr>
               <a:lnSpc>
-                <a:spcPct val="115000"/>
+                <a:spcPct val="112000"/>
               </a:lnSpc>
               <a:spcAft>
-                <a:spcPts val="1400"/>
+                <a:spcPts val="1000"/>
               </a:spcAft>
             </a:pPr>
             <a:r>
-              <a:rPr sz="2200">
+              <a:rPr sz="1900">
                 <a:solidFill>
                   <a:srgbClr val="3ED6C5"/>
                 </a:solidFill>
@@ -4560,7 +4560,7 @@
               <a:t>-  </a:t>
             </a:r>
             <a:r>
-              <a:rPr sz="2200">
+              <a:rPr sz="1900">
                 <a:solidFill>
                   <a:srgbClr val="EDEDED"/>
                 </a:solidFill>
@@ -4572,14 +4572,14 @@
           <a:p>
             <a:pPr>
               <a:lnSpc>
-                <a:spcPct val="115000"/>
+                <a:spcPct val="112000"/>
               </a:lnSpc>
               <a:spcAft>
-                <a:spcPts val="1400"/>
+                <a:spcPts val="1000"/>
               </a:spcAft>
             </a:pPr>
             <a:r>
-              <a:rPr sz="2200">
+              <a:rPr sz="1900">
                 <a:solidFill>
                   <a:srgbClr val="3ED6C5"/>
                 </a:solidFill>
@@ -4588,7 +4588,7 @@
               <a:t>-  </a:t>
             </a:r>
             <a:r>
-              <a:rPr sz="2200">
+              <a:rPr sz="1900">
                 <a:solidFill>
                   <a:srgbClr val="EDEDED"/>
                 </a:solidFill>
@@ -4600,14 +4600,14 @@
           <a:p>
             <a:pPr>
               <a:lnSpc>
-                <a:spcPct val="115000"/>
+                <a:spcPct val="112000"/>
               </a:lnSpc>
               <a:spcAft>
-                <a:spcPts val="1400"/>
+                <a:spcPts val="1000"/>
               </a:spcAft>
             </a:pPr>
             <a:r>
-              <a:rPr sz="2200">
+              <a:rPr sz="1900">
                 <a:solidFill>
                   <a:srgbClr val="3ED6C5"/>
                 </a:solidFill>
@@ -4616,7 +4616,7 @@
               <a:t>-  </a:t>
             </a:r>
             <a:r>
-              <a:rPr sz="2200">
+              <a:rPr sz="1900">
                 <a:solidFill>
                   <a:srgbClr val="EDEDED"/>
                 </a:solidFill>
@@ -4809,8 +4809,8 @@
         </p:nvSpPr>
         <p:spPr>
           <a:xfrm>
-            <a:off x="822960" y="1371600"/>
-            <a:ext cx="10515600" cy="1097280"/>
+            <a:off x="822960" y="1325880"/>
+            <a:ext cx="10607040" cy="1005840"/>
           </a:xfrm>
           <a:prstGeom prst="rect">
             <a:avLst/>
@@ -4829,7 +4829,7 @@
               </a:lnSpc>
             </a:pPr>
             <a:r>
-              <a:rPr sz="4000" b="1">
+              <a:rPr sz="3600" b="1">
                 <a:solidFill>
                   <a:srgbClr val="FFFFFF"/>
                 </a:solidFill>
@@ -4848,8 +4848,8 @@
         </p:nvSpPr>
         <p:spPr>
           <a:xfrm>
-            <a:off x="822960" y="2743200"/>
-            <a:ext cx="10424160" cy="3291840"/>
+            <a:off x="822960" y="2606040"/>
+            <a:ext cx="10515600" cy="3566160"/>
           </a:xfrm>
           <a:prstGeom prst="rect">
             <a:avLst/>
@@ -4864,14 +4864,14 @@
           <a:p>
             <a:pPr>
               <a:lnSpc>
-                <a:spcPct val="115000"/>
+                <a:spcPct val="112000"/>
               </a:lnSpc>
               <a:spcAft>
-                <a:spcPts val="1400"/>
+                <a:spcPts val="1000"/>
               </a:spcAft>
             </a:pPr>
             <a:r>
-              <a:rPr sz="2200">
+              <a:rPr sz="1900">
                 <a:solidFill>
                   <a:srgbClr val="3ED6C5"/>
                 </a:solidFill>
@@ -4880,7 +4880,7 @@
               <a:t>-  </a:t>
             </a:r>
             <a:r>
-              <a:rPr sz="2200">
+              <a:rPr sz="1900">
                 <a:solidFill>
                   <a:srgbClr val="EDEDED"/>
                 </a:solidFill>
@@ -4892,14 +4892,14 @@
           <a:p>
             <a:pPr>
               <a:lnSpc>
-                <a:spcPct val="115000"/>
+                <a:spcPct val="112000"/>
               </a:lnSpc>
               <a:spcAft>
-                <a:spcPts val="1400"/>
+                <a:spcPts val="1000"/>
               </a:spcAft>
             </a:pPr>
             <a:r>
-              <a:rPr sz="2200">
+              <a:rPr sz="1900">
                 <a:solidFill>
                   <a:srgbClr val="3ED6C5"/>
                 </a:solidFill>
@@ -4908,7 +4908,7 @@
               <a:t>-  </a:t>
             </a:r>
             <a:r>
-              <a:rPr sz="2200">
+              <a:rPr sz="1900">
                 <a:solidFill>
                   <a:srgbClr val="EDEDED"/>
                 </a:solidFill>
@@ -4920,14 +4920,14 @@
           <a:p>
             <a:pPr>
               <a:lnSpc>
-                <a:spcPct val="115000"/>
+                <a:spcPct val="112000"/>
               </a:lnSpc>
               <a:spcAft>
-                <a:spcPts val="1400"/>
+                <a:spcPts val="1000"/>
               </a:spcAft>
             </a:pPr>
             <a:r>
-              <a:rPr sz="2200">
+              <a:rPr sz="1900">
                 <a:solidFill>
                   <a:srgbClr val="3ED6C5"/>
                 </a:solidFill>
@@ -4936,7 +4936,7 @@
               <a:t>-  </a:t>
             </a:r>
             <a:r>
-              <a:rPr sz="2200">
+              <a:rPr sz="1900">
                 <a:solidFill>
                   <a:srgbClr val="EDEDED"/>
                 </a:solidFill>
@@ -4948,14 +4948,14 @@
           <a:p>
             <a:pPr>
               <a:lnSpc>
-                <a:spcPct val="115000"/>
+                <a:spcPct val="112000"/>
               </a:lnSpc>
               <a:spcAft>
-                <a:spcPts val="1400"/>
+                <a:spcPts val="1000"/>
               </a:spcAft>
             </a:pPr>
             <a:r>
-              <a:rPr sz="2200">
+              <a:rPr sz="1900">
                 <a:solidFill>
                   <a:srgbClr val="3ED6C5"/>
                 </a:solidFill>
@@ -4964,7 +4964,7 @@
               <a:t>-  </a:t>
             </a:r>
             <a:r>
-              <a:rPr sz="2200">
+              <a:rPr sz="1900">
                 <a:solidFill>
                   <a:srgbClr val="EDEDED"/>
                 </a:solidFill>
@@ -5157,8 +5157,8 @@
         </p:nvSpPr>
         <p:spPr>
           <a:xfrm>
-            <a:off x="822960" y="1371600"/>
-            <a:ext cx="10515600" cy="1097280"/>
+            <a:off x="822960" y="1325880"/>
+            <a:ext cx="10607040" cy="1005840"/>
           </a:xfrm>
           <a:prstGeom prst="rect">
             <a:avLst/>
@@ -5177,7 +5177,7 @@
               </a:lnSpc>
             </a:pPr>
             <a:r>
-              <a:rPr sz="4000" b="1">
+              <a:rPr sz="3600" b="1">
                 <a:solidFill>
                   <a:srgbClr val="FFFFFF"/>
                 </a:solidFill>
@@ -5196,8 +5196,8 @@
         </p:nvSpPr>
         <p:spPr>
           <a:xfrm>
-            <a:off x="822960" y="2743200"/>
-            <a:ext cx="10424160" cy="3291840"/>
+            <a:off x="822960" y="2606040"/>
+            <a:ext cx="10515600" cy="3566160"/>
           </a:xfrm>
           <a:prstGeom prst="rect">
             <a:avLst/>
@@ -5212,14 +5212,14 @@
           <a:p>
             <a:pPr>
               <a:lnSpc>
-                <a:spcPct val="115000"/>
+                <a:spcPct val="112000"/>
               </a:lnSpc>
               <a:spcAft>
-                <a:spcPts val="1400"/>
+                <a:spcPts val="1000"/>
               </a:spcAft>
             </a:pPr>
             <a:r>
-              <a:rPr sz="2200">
+              <a:rPr sz="1900">
                 <a:solidFill>
                   <a:srgbClr val="3ED6C5"/>
                 </a:solidFill>
@@ -5228,7 +5228,7 @@
               <a:t>-  </a:t>
             </a:r>
             <a:r>
-              <a:rPr sz="2200">
+              <a:rPr sz="1900">
                 <a:solidFill>
                   <a:srgbClr val="EDEDED"/>
                 </a:solidFill>
@@ -5240,14 +5240,14 @@
           <a:p>
             <a:pPr>
               <a:lnSpc>
-                <a:spcPct val="115000"/>
+                <a:spcPct val="112000"/>
               </a:lnSpc>
               <a:spcAft>
-                <a:spcPts val="1400"/>
+                <a:spcPts val="1000"/>
               </a:spcAft>
             </a:pPr>
             <a:r>
-              <a:rPr sz="2200">
+              <a:rPr sz="1900">
                 <a:solidFill>
                   <a:srgbClr val="3ED6C5"/>
                 </a:solidFill>
@@ -5256,7 +5256,7 @@
               <a:t>-  </a:t>
             </a:r>
             <a:r>
-              <a:rPr sz="2200">
+              <a:rPr sz="1900">
                 <a:solidFill>
                   <a:srgbClr val="EDEDED"/>
                 </a:solidFill>
@@ -5268,14 +5268,14 @@
           <a:p>
             <a:pPr>
               <a:lnSpc>
-                <a:spcPct val="115000"/>
+                <a:spcPct val="112000"/>
               </a:lnSpc>
               <a:spcAft>
-                <a:spcPts val="1400"/>
+                <a:spcPts val="1000"/>
               </a:spcAft>
             </a:pPr>
             <a:r>
-              <a:rPr sz="2200">
+              <a:rPr sz="1900">
                 <a:solidFill>
                   <a:srgbClr val="3ED6C5"/>
                 </a:solidFill>
@@ -5284,7 +5284,7 @@
               <a:t>-  </a:t>
             </a:r>
             <a:r>
-              <a:rPr sz="2200">
+              <a:rPr sz="1900">
                 <a:solidFill>
                   <a:srgbClr val="EDEDED"/>
                 </a:solidFill>
@@ -5477,8 +5477,8 @@
         </p:nvSpPr>
         <p:spPr>
           <a:xfrm>
-            <a:off x="822960" y="1463040"/>
-            <a:ext cx="10515600" cy="1097280"/>
+            <a:off x="822960" y="1417320"/>
+            <a:ext cx="10607040" cy="1005840"/>
           </a:xfrm>
           <a:prstGeom prst="rect">
             <a:avLst/>
@@ -5497,7 +5497,7 @@
               </a:lnSpc>
             </a:pPr>
             <a:r>
-              <a:rPr sz="4000" b="1">
+              <a:rPr sz="3600" b="1">
                 <a:solidFill>
                   <a:srgbClr val="FFFFFF"/>
                 </a:solidFill>
@@ -5516,7 +5516,7 @@
         </p:nvSpPr>
         <p:spPr>
           <a:xfrm>
-            <a:off x="822960" y="2926080"/>
+            <a:off x="822960" y="2880360"/>
             <a:ext cx="7680960" cy="868680"/>
           </a:xfrm>
           <a:prstGeom prst="roundRect">
@@ -5580,8 +5580,8 @@
         </p:nvSpPr>
         <p:spPr>
           <a:xfrm>
-            <a:off x="822960" y="4114800"/>
-            <a:ext cx="9601200" cy="1645920"/>
+            <a:off x="822960" y="4160520"/>
+            <a:ext cx="9692640" cy="1645920"/>
           </a:xfrm>
           <a:prstGeom prst="rect">
             <a:avLst/>
@@ -5600,7 +5600,7 @@
               </a:lnSpc>
             </a:pPr>
             <a:r>
-              <a:rPr sz="2100" b="0">
+              <a:rPr sz="2000" b="0">
                 <a:solidFill>
                   <a:srgbClr val="A1A1A1"/>
                 </a:solidFill>
@@ -5758,7 +5758,7 @@
         </p:nvSpPr>
         <p:spPr>
           <a:xfrm>
-            <a:off x="1097280" y="1828800"/>
+            <a:off x="1097280" y="1783080"/>
             <a:ext cx="9966960" cy="1828800"/>
           </a:xfrm>
           <a:prstGeom prst="rect">
@@ -5778,7 +5778,7 @@
               </a:lnSpc>
             </a:pPr>
             <a:r>
-              <a:rPr sz="4400" b="1">
+              <a:rPr sz="4000" b="1">
                 <a:solidFill>
                   <a:srgbClr val="FFFFFF"/>
                 </a:solidFill>
